--- a/public/ig/2026-10-30-nuevas/2026-10-30-stories-canva.pptx
+++ b/public/ig/2026-10-30-nuevas/2026-10-30-stories-canva.pptx
@@ -3101,12 +3101,21 @@
         <p:nvPr/>
       </p:nvGrpSpPr>
       <p:grpSpPr/>
-      <p:sp>
-        <p:nvSpPr>
-          <p:cNvPr id="2" name="Rectangle 1"/>
-          <p:cNvSpPr/>
+      <p:pic>
+        <p:nvPicPr>
+          <p:cNvPr id="2" name="Picture 1" descr="nosotras-10-anos.jpg"/>
+          <p:cNvPicPr>
+            <a:picLocks noChangeAspect="1"/>
+          </p:cNvPicPr>
           <p:nvPr/>
-        </p:nvSpPr>
+        </p:nvPicPr>
+        <p:blipFill>
+          <a:blip r:embed="rId2"/>
+          <a:srcRect l="7826" r="7826"/>
+          <a:stretch>
+            <a:fillRect/>
+          </a:stretch>
+        </p:blipFill>
         <p:spPr>
           <a:xfrm>
             <a:off x="0" y="0"/>
@@ -3115,8 +3124,26 @@
           <a:prstGeom prst="rect">
             <a:avLst/>
           </a:prstGeom>
+        </p:spPr>
+      </p:pic>
+      <p:sp>
+        <p:nvSpPr>
+          <p:cNvPr id="3" name="Rounded Rectangle 2"/>
+          <p:cNvSpPr/>
+          <p:nvPr/>
+        </p:nvSpPr>
+        <p:spPr>
+          <a:xfrm>
+            <a:off x="457200" y="10346817"/>
+            <a:ext cx="9372600" cy="6893433"/>
+          </a:xfrm>
+          <a:prstGeom prst="roundRect">
+            <a:avLst>
+              <a:gd name="adj" fmla="val 6000"/>
+            </a:avLst>
+          </a:prstGeom>
           <a:solidFill>
-            <a:srgbClr val="EBDCDC"/>
+            <a:srgbClr val="F3F3F5"/>
           </a:solidFill>
           <a:ln>
             <a:noFill/>
@@ -3146,14 +3173,14 @@
       </p:sp>
       <p:sp>
         <p:nvSpPr>
-          <p:cNvPr id="3" name="TextBox 2"/>
+          <p:cNvPr id="4" name="TextBox 3"/>
           <p:cNvSpPr txBox="1"/>
           <p:nvPr/>
         </p:nvSpPr>
         <p:spPr>
           <a:xfrm>
-            <a:off x="571500" y="0"/>
-            <a:ext cx="9144000" cy="9144000"/>
+            <a:off x="914400" y="10877550"/>
+            <a:ext cx="8458200" cy="381000"/>
           </a:xfrm>
           <a:prstGeom prst="rect">
             <a:avLst/>
@@ -3161,54 +3188,97 @@
           <a:noFill/>
         </p:spPr>
         <p:txBody>
-          <a:bodyPr wrap="square" anchor="ctr" lIns="0" rIns="0" tIns="0" bIns="0">
+          <a:bodyPr wrap="square" anchor="t" lIns="0" rIns="0" tIns="0" bIns="0">
             <a:spAutoFit/>
           </a:bodyPr>
           <a:lstStyle/>
           <a:p>
-            <a:pPr algn="ctr"/>
-            <a:r>
-              <a:rPr sz="2550" i="0">
+            <a:pPr algn="l"/>
+            <a:r>
+              <a:rPr sz="2250" i="0">
                 <a:solidFill>
-                  <a:srgbClr val="6B6D78"/>
+                  <a:srgbClr val="8E5A5E"/>
                 </a:solidFill>
                 <a:latin typeface="Jost"/>
               </a:rPr>
-              <a:t>FOTO (cámbiala en Canva)</a:t>
-            </a:r>
-          </a:p>
-          <a:p>
-            <a:pPr algn="ctr"/>
-            <a:r>
-              <a:rPr sz="2550" i="0">
+              <a:t>HOY ES EL DÍA</a:t>
+            </a:r>
+          </a:p>
+        </p:txBody>
+      </p:sp>
+      <p:sp>
+        <p:nvSpPr>
+          <p:cNvPr id="5" name="TextBox 4"/>
+          <p:cNvSpPr txBox="1"/>
+          <p:nvPr/>
+        </p:nvSpPr>
+        <p:spPr>
+          <a:xfrm>
+            <a:off x="914400" y="11677650"/>
+            <a:ext cx="8458200" cy="2944368"/>
+          </a:xfrm>
+          <a:prstGeom prst="rect">
+            <a:avLst/>
+          </a:prstGeom>
+          <a:noFill/>
+        </p:spPr>
+        <p:txBody>
+          <a:bodyPr wrap="square" anchor="t" lIns="0" rIns="0" tIns="0" bIns="0">
+            <a:spAutoFit/>
+          </a:bodyPr>
+          <a:lstStyle/>
+          <a:p>
+            <a:pPr algn="l">
+              <a:lnSpc>
+                <a:spcPct val="100000"/>
+              </a:lnSpc>
+            </a:pPr>
+            <a:r>
+              <a:rPr sz="6900" i="0">
                 <a:solidFill>
-                  <a:srgbClr val="6B6D78"/>
+                  <a:srgbClr val="22232B"/>
                 </a:solidFill>
-                <a:latin typeface="Jost"/>
+                <a:latin typeface="Bodoni Moda"/>
               </a:rPr>
-              <a:t>Aquí va una foto: una vuestra de las dos (o la foto de portada de la web)</a:t>
-            </a:r>
-          </a:p>
-        </p:txBody>
-      </p:sp>
-      <p:sp>
-        <p:nvSpPr>
-          <p:cNvPr id="4" name="Rounded Rectangle 3"/>
+              <a:t>Abrimos las puertas de </a:t>
+            </a:r>
+            <a:r>
+              <a:rPr sz="6900" i="1">
+                <a:solidFill>
+                  <a:srgbClr val="8E5A5E"/>
+                </a:solidFill>
+                <a:latin typeface="Bodoni Moda"/>
+              </a:rPr>
+              <a:t>Nubes de Algodón School</a:t>
+            </a:r>
+            <a:r>
+              <a:rPr sz="6900" i="0">
+                <a:solidFill>
+                  <a:srgbClr val="22232B"/>
+                </a:solidFill>
+                <a:latin typeface="Bodoni Moda"/>
+              </a:rPr>
+              <a:t> 🤍</a:t>
+            </a:r>
+          </a:p>
+        </p:txBody>
+      </p:sp>
+      <p:sp>
+        <p:nvSpPr>
+          <p:cNvPr id="6" name="Rectangle 5"/>
           <p:cNvSpPr/>
           <p:nvPr/>
         </p:nvSpPr>
         <p:spPr>
           <a:xfrm>
-            <a:off x="457200" y="10346817"/>
-            <a:ext cx="9372600" cy="6893433"/>
-          </a:xfrm>
-          <a:prstGeom prst="roundRect">
-            <a:avLst>
-              <a:gd name="adj" fmla="val 6000"/>
-            </a:avLst>
+            <a:off x="914400" y="15039975"/>
+            <a:ext cx="1143000" cy="28575"/>
+          </a:xfrm>
+          <a:prstGeom prst="rect">
+            <a:avLst/>
           </a:prstGeom>
           <a:solidFill>
-            <a:srgbClr val="F3F3F5"/>
+            <a:srgbClr val="8E5A5E"/>
           </a:solidFill>
           <a:ln>
             <a:noFill/>
@@ -3238,142 +3308,7 @@
       </p:sp>
       <p:sp>
         <p:nvSpPr>
-          <p:cNvPr id="5" name="TextBox 4"/>
-          <p:cNvSpPr txBox="1"/>
-          <p:nvPr/>
-        </p:nvSpPr>
-        <p:spPr>
-          <a:xfrm>
-            <a:off x="914400" y="10877550"/>
-            <a:ext cx="8458200" cy="381000"/>
-          </a:xfrm>
-          <a:prstGeom prst="rect">
-            <a:avLst/>
-          </a:prstGeom>
-          <a:noFill/>
-        </p:spPr>
-        <p:txBody>
-          <a:bodyPr wrap="square" anchor="t" lIns="0" rIns="0" tIns="0" bIns="0">
-            <a:spAutoFit/>
-          </a:bodyPr>
-          <a:lstStyle/>
-          <a:p>
-            <a:pPr algn="l"/>
-            <a:r>
-              <a:rPr sz="2250" i="0">
-                <a:solidFill>
-                  <a:srgbClr val="8E5A5E"/>
-                </a:solidFill>
-                <a:latin typeface="Jost"/>
-              </a:rPr>
-              <a:t>HOY ES EL DÍA</a:t>
-            </a:r>
-          </a:p>
-        </p:txBody>
-      </p:sp>
-      <p:sp>
-        <p:nvSpPr>
-          <p:cNvPr id="6" name="TextBox 5"/>
-          <p:cNvSpPr txBox="1"/>
-          <p:nvPr/>
-        </p:nvSpPr>
-        <p:spPr>
-          <a:xfrm>
-            <a:off x="914400" y="11677650"/>
-            <a:ext cx="8458200" cy="2944368"/>
-          </a:xfrm>
-          <a:prstGeom prst="rect">
-            <a:avLst/>
-          </a:prstGeom>
-          <a:noFill/>
-        </p:spPr>
-        <p:txBody>
-          <a:bodyPr wrap="square" anchor="t" lIns="0" rIns="0" tIns="0" bIns="0">
-            <a:spAutoFit/>
-          </a:bodyPr>
-          <a:lstStyle/>
-          <a:p>
-            <a:pPr algn="l">
-              <a:lnSpc>
-                <a:spcPct val="100000"/>
-              </a:lnSpc>
-            </a:pPr>
-            <a:r>
-              <a:rPr sz="6900" i="0">
-                <a:solidFill>
-                  <a:srgbClr val="22232B"/>
-                </a:solidFill>
-                <a:latin typeface="Bodoni Moda"/>
-              </a:rPr>
-              <a:t>Abrimos las puertas de </a:t>
-            </a:r>
-            <a:r>
-              <a:rPr sz="6900" i="1">
-                <a:solidFill>
-                  <a:srgbClr val="8E5A5E"/>
-                </a:solidFill>
-                <a:latin typeface="Bodoni Moda"/>
-              </a:rPr>
-              <a:t>Nubes de Algodón School</a:t>
-            </a:r>
-            <a:r>
-              <a:rPr sz="6900" i="0">
-                <a:solidFill>
-                  <a:srgbClr val="22232B"/>
-                </a:solidFill>
-                <a:latin typeface="Bodoni Moda"/>
-              </a:rPr>
-              <a:t> 🤍</a:t>
-            </a:r>
-          </a:p>
-        </p:txBody>
-      </p:sp>
-      <p:sp>
-        <p:nvSpPr>
-          <p:cNvPr id="7" name="Rectangle 6"/>
-          <p:cNvSpPr/>
-          <p:nvPr/>
-        </p:nvSpPr>
-        <p:spPr>
-          <a:xfrm>
-            <a:off x="914400" y="15039975"/>
-            <a:ext cx="1143000" cy="28575"/>
-          </a:xfrm>
-          <a:prstGeom prst="rect">
-            <a:avLst/>
-          </a:prstGeom>
-          <a:solidFill>
-            <a:srgbClr val="8E5A5E"/>
-          </a:solidFill>
-          <a:ln>
-            <a:noFill/>
-          </a:ln>
-        </p:spPr>
-        <p:style>
-          <a:lnRef idx="1">
-            <a:schemeClr val="accent1"/>
-          </a:lnRef>
-          <a:fillRef idx="3">
-            <a:schemeClr val="accent1"/>
-          </a:fillRef>
-          <a:effectRef idx="2">
-            <a:schemeClr val="accent1"/>
-          </a:effectRef>
-          <a:fontRef idx="minor">
-            <a:schemeClr val="lt1"/>
-          </a:fontRef>
-        </p:style>
-        <p:txBody>
-          <a:bodyPr rtlCol="0" anchor="ctr"/>
-          <a:lstStyle/>
-          <a:p>
-            <a:pPr algn="ctr"/>
-          </a:p>
-        </p:txBody>
-      </p:sp>
-      <p:sp>
-        <p:nvSpPr>
-          <p:cNvPr id="8" name="TextBox 7"/>
+          <p:cNvPr id="7" name="TextBox 6"/>
           <p:cNvSpPr txBox="1"/>
           <p:nvPr/>
         </p:nvSpPr>

--- a/public/ig/2026-10-30-nuevas/2026-10-30-stories-canva.pptx
+++ b/public/ig/2026-10-30-nuevas/2026-10-30-stories-canva.pptx
@@ -3371,16 +3371,40 @@
         <p:nvPr/>
       </p:nvGrpSpPr>
       <p:grpSpPr/>
-      <p:sp>
-        <p:nvSpPr>
-          <p:cNvPr id="2" name="TextBox 1"/>
+      <p:pic>
+        <p:nvPicPr>
+          <p:cNvPr id="2" name="Picture 1" descr=".s2-movil.png"/>
+          <p:cNvPicPr>
+            <a:picLocks noChangeAspect="1"/>
+          </p:cNvPicPr>
+          <p:nvPr/>
+        </p:nvPicPr>
+        <p:blipFill>
+          <a:blip r:embed="rId2"/>
+          <a:stretch>
+            <a:fillRect/>
+          </a:stretch>
+        </p:blipFill>
+        <p:spPr>
+          <a:xfrm>
+            <a:off x="0" y="4991100"/>
+            <a:ext cx="10287000" cy="13296900"/>
+          </a:xfrm>
+          <a:prstGeom prst="rect">
+            <a:avLst/>
+          </a:prstGeom>
+        </p:spPr>
+      </p:pic>
+      <p:sp>
+        <p:nvSpPr>
+          <p:cNvPr id="3" name="TextBox 2"/>
           <p:cNvSpPr txBox="1"/>
           <p:nvPr/>
         </p:nvSpPr>
         <p:spPr>
           <a:xfrm>
-            <a:off x="914400" y="7534275"/>
-            <a:ext cx="8458200" cy="381000"/>
+            <a:off x="857250" y="1428750"/>
+            <a:ext cx="8572500" cy="381000"/>
           </a:xfrm>
           <a:prstGeom prst="rect">
             <a:avLst/>
@@ -3393,7 +3417,7 @@
           </a:bodyPr>
           <a:lstStyle/>
           <a:p>
-            <a:pPr algn="l"/>
+            <a:pPr algn="ctr"/>
             <a:r>
               <a:rPr sz="2250" i="0">
                 <a:solidFill>
@@ -3408,14 +3432,14 @@
       </p:sp>
       <p:sp>
         <p:nvSpPr>
-          <p:cNvPr id="3" name="TextBox 2"/>
+          <p:cNvPr id="4" name="TextBox 3"/>
           <p:cNvSpPr txBox="1"/>
           <p:nvPr/>
         </p:nvSpPr>
         <p:spPr>
           <a:xfrm>
-            <a:off x="914400" y="8334375"/>
-            <a:ext cx="8458200" cy="1962912"/>
+            <a:off x="857250" y="2000250"/>
+            <a:ext cx="8572500" cy="1760220"/>
           </a:xfrm>
           <a:prstGeom prst="rect">
             <a:avLst/>
@@ -3428,13 +3452,13 @@
           </a:bodyPr>
           <a:lstStyle/>
           <a:p>
-            <a:pPr algn="l">
+            <a:pPr algn="ctr">
               <a:lnSpc>
                 <a:spcPct val="100000"/>
               </a:lnSpc>
             </a:pPr>
             <a:r>
-              <a:rPr sz="6900" i="0">
+              <a:rPr sz="6300" i="0">
                 <a:solidFill>
                   <a:srgbClr val="22232B"/>
                 </a:solidFill>
@@ -3443,7 +3467,7 @@
               <a:t>Nuestra escuela, </a:t>
             </a:r>
             <a:r>
-              <a:rPr sz="6900" i="1">
+              <a:rPr sz="6300" i="1">
                 <a:solidFill>
                   <a:srgbClr val="8E5A5E"/>
                 </a:solidFill>
@@ -3456,44 +3480,40 @@
       </p:sp>
       <p:sp>
         <p:nvSpPr>
-          <p:cNvPr id="4" name="Rectangle 3"/>
-          <p:cNvSpPr/>
+          <p:cNvPr id="5" name="TextBox 4"/>
+          <p:cNvSpPr txBox="1"/>
           <p:nvPr/>
         </p:nvSpPr>
         <p:spPr>
           <a:xfrm>
-            <a:off x="914400" y="10715625"/>
-            <a:ext cx="1143000" cy="28575"/>
+            <a:off x="857250" y="3950970"/>
+            <a:ext cx="8572500" cy="754379"/>
           </a:xfrm>
           <a:prstGeom prst="rect">
             <a:avLst/>
           </a:prstGeom>
-          <a:solidFill>
-            <a:srgbClr val="8E5A5E"/>
-          </a:solidFill>
-          <a:ln>
-            <a:noFill/>
-          </a:ln>
-        </p:spPr>
-        <p:style>
-          <a:lnRef idx="1">
-            <a:schemeClr val="accent1"/>
-          </a:lnRef>
-          <a:fillRef idx="3">
-            <a:schemeClr val="accent1"/>
-          </a:fillRef>
-          <a:effectRef idx="2">
-            <a:schemeClr val="accent1"/>
-          </a:effectRef>
-          <a:fontRef idx="minor">
-            <a:schemeClr val="lt1"/>
-          </a:fontRef>
-        </p:style>
-        <p:txBody>
-          <a:bodyPr rtlCol="0" anchor="ctr"/>
-          <a:lstStyle/>
-          <a:p>
-            <a:pPr algn="ctr"/>
+          <a:noFill/>
+        </p:spPr>
+        <p:txBody>
+          <a:bodyPr wrap="square" anchor="t" lIns="0" rIns="0" tIns="0" bIns="0">
+            <a:spAutoFit/>
+          </a:bodyPr>
+          <a:lstStyle/>
+          <a:p>
+            <a:pPr algn="ctr">
+              <a:lnSpc>
+                <a:spcPct val="120000"/>
+              </a:lnSpc>
+            </a:pPr>
+            <a:r>
+              <a:rPr sz="2850" i="0">
+                <a:solidFill>
+                  <a:srgbClr val="22232B"/>
+                </a:solidFill>
+                <a:latin typeface="Jost"/>
+              </a:rPr>
+              <a:t>Entra, cotillea y quédate todo lo que quieras 🤍</a:t>
+            </a:r>
           </a:p>
         </p:txBody>
       </p:sp>
@@ -3523,16 +3543,40 @@
         <p:nvPr/>
       </p:nvGrpSpPr>
       <p:grpSpPr/>
-      <p:sp>
-        <p:nvSpPr>
-          <p:cNvPr id="2" name="TextBox 1"/>
+      <p:pic>
+        <p:nvPicPr>
+          <p:cNvPr id="2" name="Picture 1" descr=".s3-movil.png"/>
+          <p:cNvPicPr>
+            <a:picLocks noChangeAspect="1"/>
+          </p:cNvPicPr>
+          <p:nvPr/>
+        </p:nvPicPr>
+        <p:blipFill>
+          <a:blip r:embed="rId2"/>
+          <a:stretch>
+            <a:fillRect/>
+          </a:stretch>
+        </p:blipFill>
+        <p:spPr>
+          <a:xfrm>
+            <a:off x="0" y="5495925"/>
+            <a:ext cx="10287000" cy="12792075"/>
+          </a:xfrm>
+          <a:prstGeom prst="rect">
+            <a:avLst/>
+          </a:prstGeom>
+        </p:spPr>
+      </p:pic>
+      <p:sp>
+        <p:nvSpPr>
+          <p:cNvPr id="3" name="TextBox 2"/>
           <p:cNvSpPr txBox="1"/>
           <p:nvPr/>
         </p:nvSpPr>
         <p:spPr>
           <a:xfrm>
-            <a:off x="914400" y="7534275"/>
-            <a:ext cx="8458200" cy="381000"/>
+            <a:off x="857250" y="1428750"/>
+            <a:ext cx="8572500" cy="381000"/>
           </a:xfrm>
           <a:prstGeom prst="rect">
             <a:avLst/>
@@ -3545,7 +3589,7 @@
           </a:bodyPr>
           <a:lstStyle/>
           <a:p>
-            <a:pPr algn="l"/>
+            <a:pPr algn="ctr"/>
             <a:r>
               <a:rPr sz="2250" i="0">
                 <a:solidFill>
@@ -3560,14 +3604,14 @@
       </p:sp>
       <p:sp>
         <p:nvSpPr>
-          <p:cNvPr id="3" name="TextBox 2"/>
+          <p:cNvPr id="4" name="TextBox 3"/>
           <p:cNvSpPr txBox="1"/>
           <p:nvPr/>
         </p:nvSpPr>
         <p:spPr>
           <a:xfrm>
-            <a:off x="914400" y="8334375"/>
-            <a:ext cx="8458200" cy="1962912"/>
+            <a:off x="857250" y="2000250"/>
+            <a:ext cx="8572500" cy="1760220"/>
           </a:xfrm>
           <a:prstGeom prst="rect">
             <a:avLst/>
@@ -3580,13 +3624,13 @@
           </a:bodyPr>
           <a:lstStyle/>
           <a:p>
-            <a:pPr algn="l">
+            <a:pPr algn="ctr">
               <a:lnSpc>
                 <a:spcPct val="100000"/>
               </a:lnSpc>
             </a:pPr>
             <a:r>
-              <a:rPr sz="6900" i="0">
+              <a:rPr sz="6300" i="0">
                 <a:solidFill>
                   <a:srgbClr val="22232B"/>
                 </a:solidFill>
@@ -3595,7 +3639,7 @@
               <a:t>Wedding Planner </a:t>
             </a:r>
             <a:r>
-              <a:rPr sz="6900" i="1">
+              <a:rPr sz="6300" i="1">
                 <a:solidFill>
                   <a:srgbClr val="8E5A5E"/>
                 </a:solidFill>
@@ -3608,44 +3652,40 @@
       </p:sp>
       <p:sp>
         <p:nvSpPr>
-          <p:cNvPr id="4" name="Rectangle 3"/>
-          <p:cNvSpPr/>
+          <p:cNvPr id="5" name="TextBox 4"/>
+          <p:cNvSpPr txBox="1"/>
           <p:nvPr/>
         </p:nvSpPr>
         <p:spPr>
           <a:xfrm>
-            <a:off x="914400" y="10715625"/>
-            <a:ext cx="1143000" cy="28575"/>
+            <a:off x="857250" y="3950970"/>
+            <a:ext cx="8572500" cy="1259205"/>
           </a:xfrm>
           <a:prstGeom prst="rect">
             <a:avLst/>
           </a:prstGeom>
-          <a:solidFill>
-            <a:srgbClr val="8E5A5E"/>
-          </a:solidFill>
-          <a:ln>
-            <a:noFill/>
-          </a:ln>
-        </p:spPr>
-        <p:style>
-          <a:lnRef idx="1">
-            <a:schemeClr val="accent1"/>
-          </a:lnRef>
-          <a:fillRef idx="3">
-            <a:schemeClr val="accent1"/>
-          </a:fillRef>
-          <a:effectRef idx="2">
-            <a:schemeClr val="accent1"/>
-          </a:effectRef>
-          <a:fontRef idx="minor">
-            <a:schemeClr val="lt1"/>
-          </a:fontRef>
-        </p:style>
-        <p:txBody>
-          <a:bodyPr rtlCol="0" anchor="ctr"/>
-          <a:lstStyle/>
-          <a:p>
-            <a:pPr algn="ctr"/>
+          <a:noFill/>
+        </p:spPr>
+        <p:txBody>
+          <a:bodyPr wrap="square" anchor="t" lIns="0" rIns="0" tIns="0" bIns="0">
+            <a:spAutoFit/>
+          </a:bodyPr>
+          <a:lstStyle/>
+          <a:p>
+            <a:pPr algn="ctr">
+              <a:lnSpc>
+                <a:spcPct val="120000"/>
+              </a:lnSpc>
+            </a:pPr>
+            <a:r>
+              <a:rPr sz="2850" i="0">
+                <a:solidFill>
+                  <a:srgbClr val="22232B"/>
+                </a:solidFill>
+                <a:latin typeface="Jost"/>
+              </a:rPr>
+              <a:t>El método Nubes en 7 días: planificas una boda de práctica de principio a fin. 47 € IVA incluido.</a:t>
+            </a:r>
           </a:p>
         </p:txBody>
       </p:sp>
@@ -4156,16 +4196,40 @@
         <p:nvPr/>
       </p:nvGrpSpPr>
       <p:grpSpPr/>
-      <p:sp>
-        <p:nvSpPr>
-          <p:cNvPr id="2" name="TextBox 1"/>
+      <p:pic>
+        <p:nvPicPr>
+          <p:cNvPr id="2" name="Picture 1" descr=".s5-movil.png"/>
+          <p:cNvPicPr>
+            <a:picLocks noChangeAspect="1"/>
+          </p:cNvPicPr>
+          <p:nvPr/>
+        </p:nvPicPr>
+        <p:blipFill>
+          <a:blip r:embed="rId2"/>
+          <a:stretch>
+            <a:fillRect/>
+          </a:stretch>
+        </p:blipFill>
+        <p:spPr>
+          <a:xfrm>
+            <a:off x="0" y="5495925"/>
+            <a:ext cx="10287000" cy="12792075"/>
+          </a:xfrm>
+          <a:prstGeom prst="rect">
+            <a:avLst/>
+          </a:prstGeom>
+        </p:spPr>
+      </p:pic>
+      <p:sp>
+        <p:nvSpPr>
+          <p:cNvPr id="3" name="TextBox 2"/>
           <p:cNvSpPr txBox="1"/>
           <p:nvPr/>
         </p:nvSpPr>
         <p:spPr>
           <a:xfrm>
-            <a:off x="914400" y="7534275"/>
-            <a:ext cx="8458200" cy="381000"/>
+            <a:off x="857250" y="1428750"/>
+            <a:ext cx="8572500" cy="381000"/>
           </a:xfrm>
           <a:prstGeom prst="rect">
             <a:avLst/>
@@ -4178,7 +4242,7 @@
           </a:bodyPr>
           <a:lstStyle/>
           <a:p>
-            <a:pPr algn="l"/>
+            <a:pPr algn="ctr"/>
             <a:r>
               <a:rPr sz="2250" i="0">
                 <a:solidFill>
@@ -4193,14 +4257,14 @@
       </p:sp>
       <p:sp>
         <p:nvSpPr>
-          <p:cNvPr id="3" name="TextBox 2"/>
+          <p:cNvPr id="4" name="TextBox 3"/>
           <p:cNvSpPr txBox="1"/>
           <p:nvPr/>
         </p:nvSpPr>
         <p:spPr>
           <a:xfrm>
-            <a:off x="914400" y="8334375"/>
-            <a:ext cx="8458200" cy="1962912"/>
+            <a:off x="857250" y="2000250"/>
+            <a:ext cx="8572500" cy="1760220"/>
           </a:xfrm>
           <a:prstGeom prst="rect">
             <a:avLst/>
@@ -4213,13 +4277,13 @@
           </a:bodyPr>
           <a:lstStyle/>
           <a:p>
-            <a:pPr algn="l">
+            <a:pPr algn="ctr">
               <a:lnSpc>
                 <a:spcPct val="100000"/>
               </a:lnSpc>
             </a:pPr>
             <a:r>
-              <a:rPr sz="6900" i="0">
+              <a:rPr sz="6300" i="0">
                 <a:solidFill>
                   <a:srgbClr val="22232B"/>
                 </a:solidFill>
@@ -4228,7 +4292,7 @@
               <a:t>Online, Completo o </a:t>
             </a:r>
             <a:r>
-              <a:rPr sz="6900" i="1">
+              <a:rPr sz="6300" i="1">
                 <a:solidFill>
                   <a:srgbClr val="8E5A5E"/>
                 </a:solidFill>
@@ -4241,44 +4305,40 @@
       </p:sp>
       <p:sp>
         <p:nvSpPr>
-          <p:cNvPr id="4" name="Rectangle 3"/>
-          <p:cNvSpPr/>
+          <p:cNvPr id="5" name="TextBox 4"/>
+          <p:cNvSpPr txBox="1"/>
           <p:nvPr/>
         </p:nvSpPr>
         <p:spPr>
           <a:xfrm>
-            <a:off x="914400" y="10715625"/>
-            <a:ext cx="1143000" cy="28575"/>
+            <a:off x="857250" y="3950970"/>
+            <a:ext cx="8572500" cy="1259205"/>
           </a:xfrm>
           <a:prstGeom prst="rect">
             <a:avLst/>
           </a:prstGeom>
-          <a:solidFill>
-            <a:srgbClr val="8E5A5E"/>
-          </a:solidFill>
-          <a:ln>
-            <a:noFill/>
-          </a:ln>
-        </p:spPr>
-        <p:style>
-          <a:lnRef idx="1">
-            <a:schemeClr val="accent1"/>
-          </a:lnRef>
-          <a:fillRef idx="3">
-            <a:schemeClr val="accent1"/>
-          </a:fillRef>
-          <a:effectRef idx="2">
-            <a:schemeClr val="accent1"/>
-          </a:effectRef>
-          <a:fontRef idx="minor">
-            <a:schemeClr val="lt1"/>
-          </a:fontRef>
-        </p:style>
-        <p:txBody>
-          <a:bodyPr rtlCol="0" anchor="ctr"/>
-          <a:lstStyle/>
-          <a:p>
-            <a:pPr algn="ctr"/>
+          <a:noFill/>
+        </p:spPr>
+        <p:txBody>
+          <a:bodyPr wrap="square" anchor="t" lIns="0" rIns="0" tIns="0" bIns="0">
+            <a:spAutoFit/>
+          </a:bodyPr>
+          <a:lstStyle/>
+          <a:p>
+            <a:pPr algn="ctr">
+              <a:lnSpc>
+                <a:spcPct val="120000"/>
+              </a:lnSpc>
+            </a:pPr>
+            <a:r>
+              <a:rPr sz="2850" i="0">
+                <a:solidFill>
+                  <a:srgbClr val="22232B"/>
+                </a:solidFill>
+                <a:latin typeface="Jost"/>
+              </a:rPr>
+              <a:t>Y si después quieres subir de nivel, solo pagas la diferencia.</a:t>
+            </a:r>
           </a:p>
         </p:txBody>
       </p:sp>
